--- a/madd-decks/dagger-alif/05-ra-zay.pptx
+++ b/madd-decks/dagger-alif/05-ra-zay.pptx
@@ -4,6 +4,9 @@
   <p:sldMasterIdLst>
     <p:sldMasterId id="2147483648" r:id="rId1"/>
   </p:sldMasterIdLst>
+  <p:notesMasterIdLst>
+    <p:notesMasterId r:id="rId27"/>
+  </p:notesMasterIdLst>
   <p:sldIdLst>
     <p:sldId id="256" r:id="rId2"/>
     <p:sldId id="257" r:id="rId3"/>
@@ -31,9 +34,6 @@
     <p:sldId id="279" r:id="rId25"/>
     <p:sldId id="280" r:id="rId26"/>
   </p:sldIdLst>
-  <p:notesMasterIdLst>
-    <p:notesMasterId r:id="rId27"/>
-  </p:notesMasterIdLst>
   <p:sldSz cx="9144000" cy="5143500"/>
   <p:notesSz cx="5143500" cy="9144000"/>
   <p:defaultTextStyle>
@@ -4844,9 +4844,6 @@
               </a:rPr>
               <a:t>عَزَ</a:t>
             </a:r>
-            <a:pPr algn="ctr" indent="0" marL="0">
-              <a:buNone/>
-            </a:pPr>
             <a:r>
               <a:rPr lang="ar-SA" altLang="en-US" sz="5850" dirty="0">
                 <a:solidFill>
@@ -6269,9 +6266,6 @@
               </a:rPr>
               <a:t>زَ</a:t>
             </a:r>
-            <a:pPr algn="ctr" indent="0" marL="0">
-              <a:buNone/>
-            </a:pPr>
             <a:r>
               <a:rPr lang="ar-SA" altLang="en-US" sz="5850" dirty="0">
                 <a:solidFill>
@@ -6283,9 +6277,6 @@
               </a:rPr>
               <a:t>ا</a:t>
             </a:r>
-            <a:pPr algn="ctr" indent="0" marL="0">
-              <a:buNone/>
-            </a:pPr>
             <a:r>
               <a:rPr lang="ar-SA" altLang="en-US" sz="9000" dirty="0">
                 <a:solidFill>
@@ -7708,9 +7699,6 @@
               </a:rPr>
               <a:t>زَ</a:t>
             </a:r>
-            <a:pPr algn="ctr" indent="0" marL="0">
-              <a:buNone/>
-            </a:pPr>
             <a:r>
               <a:rPr lang="ar-SA" altLang="en-US" sz="5850" dirty="0">
                 <a:solidFill>
@@ -7722,9 +7710,6 @@
               </a:rPr>
               <a:t>ا</a:t>
             </a:r>
-            <a:pPr algn="ctr" indent="0" marL="0">
-              <a:buNone/>
-            </a:pPr>
             <a:r>
               <a:rPr lang="ar-SA" altLang="en-US" sz="9000" dirty="0">
                 <a:solidFill>
@@ -9147,9 +9132,6 @@
               </a:rPr>
               <a:t>زَ</a:t>
             </a:r>
-            <a:pPr algn="ctr" indent="0" marL="0">
-              <a:buNone/>
-            </a:pPr>
             <a:r>
               <a:rPr lang="ar-SA" altLang="en-US" sz="5850" dirty="0">
                 <a:solidFill>
@@ -9161,9 +9143,6 @@
               </a:rPr>
               <a:t>ا</a:t>
             </a:r>
-            <a:pPr algn="ctr" indent="0" marL="0">
-              <a:buNone/>
-            </a:pPr>
             <a:r>
               <a:rPr lang="ar-SA" altLang="en-US" sz="9000" dirty="0">
                 <a:solidFill>
@@ -10714,9 +10693,6 @@
               </a:rPr>
               <a:t>نَصَرَ</a:t>
             </a:r>
-            <a:pPr algn="ctr" indent="0" marL="0">
-              <a:buNone/>
-            </a:pPr>
             <a:r>
               <a:rPr lang="ar-SA" altLang="en-US" sz="4290" dirty="0">
                 <a:solidFill>
@@ -12429,9 +12405,6 @@
               </a:rPr>
               <a:t>كَسَرَ</a:t>
             </a:r>
-            <a:pPr algn="ctr" indent="0" marL="0">
-              <a:buNone/>
-            </a:pPr>
             <a:r>
               <a:rPr lang="ar-SA" altLang="en-US" sz="4290" dirty="0">
                 <a:solidFill>
@@ -14144,9 +14117,6 @@
               </a:rPr>
               <a:t>ذَكَرَ</a:t>
             </a:r>
-            <a:pPr algn="ctr" indent="0" marL="0">
-              <a:buNone/>
-            </a:pPr>
             <a:r>
               <a:rPr lang="ar-SA" altLang="en-US" sz="4290" dirty="0">
                 <a:solidFill>
@@ -15859,9 +15829,6 @@
               </a:rPr>
               <a:t>رَ</a:t>
             </a:r>
-            <a:pPr algn="ctr" indent="0" marL="0">
-              <a:buNone/>
-            </a:pPr>
             <a:r>
               <a:rPr lang="ar-SA" altLang="en-US" sz="4290" dirty="0">
                 <a:solidFill>
@@ -15873,9 +15840,6 @@
               </a:rPr>
               <a:t>ا</a:t>
             </a:r>
-            <a:pPr algn="ctr" indent="0" marL="0">
-              <a:buNone/>
-            </a:pPr>
             <a:r>
               <a:rPr lang="ar-SA" altLang="en-US" sz="6600" dirty="0">
                 <a:solidFill>
@@ -17588,9 +17552,6 @@
               </a:rPr>
               <a:t>رَ</a:t>
             </a:r>
-            <a:pPr algn="ctr" indent="0" marL="0">
-              <a:buNone/>
-            </a:pPr>
             <a:r>
               <a:rPr lang="ar-SA" altLang="en-US" sz="4290" dirty="0">
                 <a:solidFill>
@@ -17602,9 +17563,6 @@
               </a:rPr>
               <a:t>ا</a:t>
             </a:r>
-            <a:pPr algn="ctr" indent="0" marL="0">
-              <a:buNone/>
-            </a:pPr>
             <a:r>
               <a:rPr lang="ar-SA" altLang="en-US" sz="6600" dirty="0">
                 <a:solidFill>
@@ -19317,9 +19275,6 @@
               </a:rPr>
               <a:t>رَ</a:t>
             </a:r>
-            <a:pPr algn="ctr" indent="0" marL="0">
-              <a:buNone/>
-            </a:pPr>
             <a:r>
               <a:rPr lang="ar-SA" altLang="en-US" sz="4290" dirty="0">
                 <a:solidFill>
@@ -19331,9 +19286,6 @@
               </a:rPr>
               <a:t>ا</a:t>
             </a:r>
-            <a:pPr algn="ctr" indent="0" marL="0">
-              <a:buNone/>
-            </a:pPr>
             <a:r>
               <a:rPr lang="ar-SA" altLang="en-US" sz="6600" dirty="0">
                 <a:solidFill>
@@ -20918,9 +20870,6 @@
               </a:rPr>
               <a:t>ذَرَ</a:t>
             </a:r>
-            <a:pPr algn="ctr" indent="0" marL="0">
-              <a:buNone/>
-            </a:pPr>
             <a:r>
               <a:rPr lang="ar-SA" altLang="en-US" sz="5850" dirty="0">
                 <a:solidFill>
@@ -22471,9 +22420,6 @@
               </a:rPr>
               <a:t>عَجَزَ</a:t>
             </a:r>
-            <a:pPr algn="ctr" indent="0" marL="0">
-              <a:buNone/>
-            </a:pPr>
             <a:r>
               <a:rPr lang="ar-SA" altLang="en-US" sz="4290" dirty="0">
                 <a:solidFill>
@@ -24186,9 +24132,6 @@
               </a:rPr>
               <a:t>بَرَزَ</a:t>
             </a:r>
-            <a:pPr algn="ctr" indent="0" marL="0">
-              <a:buNone/>
-            </a:pPr>
             <a:r>
               <a:rPr lang="ar-SA" altLang="en-US" sz="4290" dirty="0">
                 <a:solidFill>
@@ -25901,9 +25844,6 @@
               </a:rPr>
               <a:t>رَكَزَ</a:t>
             </a:r>
-            <a:pPr algn="ctr" indent="0" marL="0">
-              <a:buNone/>
-            </a:pPr>
             <a:r>
               <a:rPr lang="ar-SA" altLang="en-US" sz="4290" dirty="0">
                 <a:solidFill>
@@ -27616,9 +27556,6 @@
               </a:rPr>
               <a:t>زَ</a:t>
             </a:r>
-            <a:pPr algn="ctr" indent="0" marL="0">
-              <a:buNone/>
-            </a:pPr>
             <a:r>
               <a:rPr lang="ar-SA" altLang="en-US" sz="4290" dirty="0">
                 <a:solidFill>
@@ -27630,9 +27567,6 @@
               </a:rPr>
               <a:t>ا</a:t>
             </a:r>
-            <a:pPr algn="ctr" indent="0" marL="0">
-              <a:buNone/>
-            </a:pPr>
             <a:r>
               <a:rPr lang="ar-SA" altLang="en-US" sz="6600" dirty="0">
                 <a:solidFill>
@@ -29345,9 +29279,6 @@
               </a:rPr>
               <a:t>زَ</a:t>
             </a:r>
-            <a:pPr algn="ctr" indent="0" marL="0">
-              <a:buNone/>
-            </a:pPr>
             <a:r>
               <a:rPr lang="ar-SA" altLang="en-US" sz="4290" dirty="0">
                 <a:solidFill>
@@ -29359,9 +29290,6 @@
               </a:rPr>
               <a:t>ا</a:t>
             </a:r>
-            <a:pPr algn="ctr" indent="0" marL="0">
-              <a:buNone/>
-            </a:pPr>
             <a:r>
               <a:rPr lang="ar-SA" altLang="en-US" sz="6600" dirty="0">
                 <a:solidFill>
@@ -31074,9 +31002,6 @@
               </a:rPr>
               <a:t>زَ</a:t>
             </a:r>
-            <a:pPr algn="ctr" indent="0" marL="0">
-              <a:buNone/>
-            </a:pPr>
             <a:r>
               <a:rPr lang="ar-SA" altLang="en-US" sz="4290" dirty="0">
                 <a:solidFill>
@@ -31088,9 +31013,6 @@
               </a:rPr>
               <a:t>ا</a:t>
             </a:r>
-            <a:pPr algn="ctr" indent="0" marL="0">
-              <a:buNone/>
-            </a:pPr>
             <a:r>
               <a:rPr lang="ar-SA" altLang="en-US" sz="6600" dirty="0">
                 <a:solidFill>
@@ -32675,9 +32597,6 @@
               </a:rPr>
               <a:t>سَرَ</a:t>
             </a:r>
-            <a:pPr algn="ctr" indent="0" marL="0">
-              <a:buNone/>
-            </a:pPr>
             <a:r>
               <a:rPr lang="ar-SA" altLang="en-US" sz="5850" dirty="0">
                 <a:solidFill>
@@ -34100,9 +34019,6 @@
               </a:rPr>
               <a:t>رَ</a:t>
             </a:r>
-            <a:pPr algn="ctr" indent="0" marL="0">
-              <a:buNone/>
-            </a:pPr>
             <a:r>
               <a:rPr lang="ar-SA" altLang="en-US" sz="5850" dirty="0">
                 <a:solidFill>
@@ -34114,9 +34030,6 @@
               </a:rPr>
               <a:t>ا</a:t>
             </a:r>
-            <a:pPr algn="ctr" indent="0" marL="0">
-              <a:buNone/>
-            </a:pPr>
             <a:r>
               <a:rPr lang="ar-SA" altLang="en-US" sz="9000" dirty="0">
                 <a:solidFill>
@@ -35539,9 +35452,6 @@
               </a:rPr>
               <a:t>رَ</a:t>
             </a:r>
-            <a:pPr algn="ctr" indent="0" marL="0">
-              <a:buNone/>
-            </a:pPr>
             <a:r>
               <a:rPr lang="ar-SA" altLang="en-US" sz="5850" dirty="0">
                 <a:solidFill>
@@ -35553,9 +35463,6 @@
               </a:rPr>
               <a:t>ا</a:t>
             </a:r>
-            <a:pPr algn="ctr" indent="0" marL="0">
-              <a:buNone/>
-            </a:pPr>
             <a:r>
               <a:rPr lang="ar-SA" altLang="en-US" sz="9000" dirty="0">
                 <a:solidFill>
@@ -36978,9 +36885,6 @@
               </a:rPr>
               <a:t>رَ</a:t>
             </a:r>
-            <a:pPr algn="ctr" indent="0" marL="0">
-              <a:buNone/>
-            </a:pPr>
             <a:r>
               <a:rPr lang="ar-SA" altLang="en-US" sz="5850" dirty="0">
                 <a:solidFill>
@@ -36992,9 +36896,6 @@
               </a:rPr>
               <a:t>ا</a:t>
             </a:r>
-            <a:pPr algn="ctr" indent="0" marL="0">
-              <a:buNone/>
-            </a:pPr>
             <a:r>
               <a:rPr lang="ar-SA" altLang="en-US" sz="9000" dirty="0">
                 <a:solidFill>
@@ -39339,9 +39240,6 @@
               </a:rPr>
               <a:t>غَزَ</a:t>
             </a:r>
-            <a:pPr algn="ctr" indent="0" marL="0">
-              <a:buNone/>
-            </a:pPr>
             <a:r>
               <a:rPr lang="ar-SA" altLang="en-US" sz="5850" dirty="0">
                 <a:solidFill>
@@ -40764,9 +40662,6 @@
               </a:rPr>
               <a:t>نَزَ</a:t>
             </a:r>
-            <a:pPr algn="ctr" indent="0" marL="0">
-              <a:buNone/>
-            </a:pPr>
             <a:r>
               <a:rPr lang="ar-SA" altLang="en-US" sz="5850" dirty="0">
                 <a:solidFill>
